--- a/Лекция_5_Геометрическая_оптика.pptx
+++ b/Лекция_5_Геометрическая_оптика.pptx
@@ -3864,7 +3864,7 @@
                 <a:solidFill>
                   <a:srgbClr val="EEEEEE"/>
                 </a:solidFill>
-                <a:latin typeface="Calibri"/>
+                <a:latin typeface="Cambria Math"/>
               </a:defRPr>
             </a:pPr>
             <a:r>
@@ -4096,11 +4096,11 @@
                 <a:solidFill>
                   <a:srgbClr val="EEEEEE"/>
                 </a:solidFill>
-                <a:latin typeface="Calibri"/>
+                <a:latin typeface="Cambria Math"/>
               </a:defRPr>
             </a:pPr>
             <a:r>
-              <a:t>NA = n sin(theta)</a:t>
+              <a:t>NA = n sin(θ)</a:t>
             </a:r>
           </a:p>
           <a:p>

--- a/Лекция_5_Геометрическая_оптика.pptx
+++ b/Лекция_5_Геометрическая_оптика.pptx
@@ -12,6 +12,8 @@
     <p:sldId id="260" r:id="rId11"/>
     <p:sldId id="261" r:id="rId12"/>
     <p:sldId id="262" r:id="rId13"/>
+    <p:sldId id="263" r:id="rId14"/>
+    <p:sldId id="264" r:id="rId15"/>
   </p:sldIdLst>
   <p:sldSz cx="12191695" cy="6858000" type="screen4x3"/>
   <p:notesSz cx="6858000" cy="9144000"/>
@@ -3125,7 +3127,7 @@
           <a:lstStyle/>
           <a:p>
             <a:pPr algn="l">
-              <a:defRPr sz="2800" b="1">
+              <a:defRPr sz="2400" b="1">
                 <a:solidFill>
                   <a:srgbClr val="EEEEEE"/>
                 </a:solidFill>
@@ -3133,7 +3135,7 @@
               </a:defRPr>
             </a:pPr>
             <a:r>
-              <a:t>1. ГЕОМЕТРИЧЕСКАЯ ОПТИКА</a:t>
+              <a:t>1. ФОРМИРОВАНИЕ ЛАЗЕРНОГО ПЯТНА</a:t>
             </a:r>
           </a:p>
         </p:txBody>
@@ -3189,7 +3191,7 @@
         </p:nvSpPr>
         <p:spPr>
           <a:xfrm>
-            <a:off x="1371600" y="1828800"/>
+            <a:off x="1371600" y="1737360"/>
             <a:ext cx="9418320" cy="914400"/>
           </a:xfrm>
           <a:prstGeom prst="rect">
@@ -3204,7 +3206,7 @@
           <a:lstStyle/>
           <a:p>
             <a:pPr algn="l">
-              <a:defRPr sz="2200" b="0">
+              <a:defRPr sz="2000" b="0">
                 <a:solidFill>
                   <a:srgbClr val="EEEEEE"/>
                 </a:solidFill>
@@ -3212,7 +3214,7 @@
               </a:defRPr>
             </a:pPr>
             <a:r>
-              <a:t>Лекция 5: как линзы собирают луч в пятно</a:t>
+              <a:t>Лекция 5: геометрическая и физическая оптика</a:t>
             </a:r>
           </a:p>
         </p:txBody>
@@ -3225,7 +3227,7 @@
         </p:nvSpPr>
         <p:spPr>
           <a:xfrm>
-            <a:off x="1371600" y="2743200"/>
+            <a:off x="1371600" y="2651760"/>
             <a:ext cx="9418320" cy="1097280"/>
           </a:xfrm>
           <a:prstGeom prst="rect">
@@ -3248,7 +3250,7 @@
               </a:defRPr>
             </a:pPr>
             <a:r>
-              <a:t>Плотность мощности, NA, DOF и M²</a:t>
+              <a:t>Пятно, дифракция, NA, DOF, тракт СЛП и M²</a:t>
             </a:r>
           </a:p>
         </p:txBody>
@@ -3261,8 +3263,8 @@
         </p:nvSpPr>
         <p:spPr>
           <a:xfrm>
-            <a:off x="1371600" y="3840480"/>
-            <a:ext cx="9418320" cy="914400"/>
+            <a:off x="1371600" y="3749039"/>
+            <a:ext cx="9418320" cy="1097280"/>
           </a:xfrm>
           <a:prstGeom prst="rect">
             <a:avLst/>
@@ -3276,7 +3278,7 @@
           <a:lstStyle/>
           <a:p>
             <a:pPr algn="l">
-              <a:defRPr sz="1700" b="0">
+              <a:defRPr sz="1600" b="0">
                 <a:solidFill>
                   <a:srgbClr val="EEEEEE"/>
                 </a:solidFill>
@@ -3284,7 +3286,7 @@
               </a:defRPr>
             </a:pPr>
             <a:r>
-              <a:t>Оптика как главный усилитель лазерного станка</a:t>
+              <a:t>Базу геометрической оптики уже знаем — сегодня предел пятна и практика СЛП</a:t>
             </a:r>
           </a:p>
         </p:txBody>
@@ -3402,7 +3404,7 @@
         </p:nvSpPr>
         <p:spPr>
           <a:xfrm>
-            <a:off x="1371600" y="1417320"/>
+            <a:off x="1371600" y="1325880"/>
             <a:ext cx="9418320" cy="5029200"/>
           </a:xfrm>
           <a:prstGeom prst="rect">
@@ -3420,7 +3422,7 @@
               <a:spcAft>
                 <a:spcPts val="1200"/>
               </a:spcAft>
-              <a:defRPr sz="1800">
+              <a:defRPr sz="1600">
                 <a:solidFill>
                   <a:srgbClr val="EEEEEE"/>
                 </a:solidFill>
@@ -3428,7 +3430,7 @@
               </a:defRPr>
             </a:pPr>
             <a:r>
-              <a:t>1. Плотность мощности I = P/S — расчёты</a:t>
+              <a:t>1. I = P/S</a:t>
             </a:r>
           </a:p>
           <a:p>
@@ -3436,7 +3438,7 @@
               <a:spcAft>
                 <a:spcPts val="1200"/>
               </a:spcAft>
-              <a:defRPr sz="1800">
+              <a:defRPr sz="1600">
                 <a:solidFill>
                   <a:srgbClr val="EEEEEE"/>
                 </a:solidFill>
@@ -3444,7 +3446,7 @@
               </a:defRPr>
             </a:pPr>
             <a:r>
-              <a:t>2. Закон Снеллиуса и работа линзы</a:t>
+              <a:t>2. Лучи и волны</a:t>
             </a:r>
           </a:p>
           <a:p>
@@ -3452,7 +3454,7 @@
               <a:spcAft>
                 <a:spcPts val="1200"/>
               </a:spcAft>
-              <a:defRPr sz="1800">
+              <a:defRPr sz="1600">
                 <a:solidFill>
                   <a:srgbClr val="EEEEEE"/>
                 </a:solidFill>
@@ -3460,7 +3462,7 @@
               </a:defRPr>
             </a:pPr>
             <a:r>
-              <a:t>3. Формула №1: d ~ λ/NA</a:t>
+              <a:t>3. d ~ λ/NA</a:t>
             </a:r>
           </a:p>
           <a:p>
@@ -3468,7 +3470,7 @@
               <a:spcAft>
                 <a:spcPts val="1200"/>
               </a:spcAft>
-              <a:defRPr sz="1800">
+              <a:defRPr sz="1600">
                 <a:solidFill>
                   <a:srgbClr val="EEEEEE"/>
                 </a:solidFill>
@@ -3476,7 +3478,7 @@
               </a:defRPr>
             </a:pPr>
             <a:r>
-              <a:t>4. Формула №2: DOF ~ λ/NA²</a:t>
+              <a:t>4. Тракт СЛП: F-θ, гальво, защита</a:t>
             </a:r>
           </a:p>
           <a:p>
@@ -3484,15 +3486,47 @@
               <a:spcAft>
                 <a:spcPts val="1200"/>
               </a:spcAft>
-              <a:defRPr sz="1800">
+              <a:defRPr sz="1600">
                 <a:solidFill>
                   <a:srgbClr val="EEEEEE"/>
                 </a:solidFill>
+                <a:latin typeface="Cambria Math"/>
+              </a:defRPr>
+            </a:pPr>
+            <a:r>
+              <a:t>5. DOF ~ λ/NA²</a:t>
+            </a:r>
+          </a:p>
+          <a:p>
+            <a:pPr>
+              <a:spcAft>
+                <a:spcPts val="1200"/>
+              </a:spcAft>
+              <a:defRPr sz="1600">
+                <a:solidFill>
+                  <a:srgbClr val="EEEEEE"/>
+                </a:solidFill>
                 <a:latin typeface="Calibri"/>
               </a:defRPr>
             </a:pPr>
             <a:r>
-              <a:t>5. Формула №3: M² и итоги</a:t>
+              <a:t>6. Фокус: z-offset</a:t>
+            </a:r>
+          </a:p>
+          <a:p>
+            <a:pPr>
+              <a:spcAft>
+                <a:spcPts val="1200"/>
+              </a:spcAft>
+              <a:defRPr sz="1600">
+                <a:solidFill>
+                  <a:srgbClr val="EEEEEE"/>
+                </a:solidFill>
+                <a:latin typeface="Calibri"/>
+              </a:defRPr>
+            </a:pPr>
+            <a:r>
+              <a:t>7. M² и итоги</a:t>
             </a:r>
           </a:p>
         </p:txBody>
@@ -3700,7 +3734,7 @@
               </a:defRPr>
             </a:pPr>
             <a:r>
-              <a:t>Линза сжимает энергию в пространстве</a:t>
+              <a:t>Оптика сжимает энергию в пространстве</a:t>
             </a:r>
           </a:p>
         </p:txBody>
@@ -3786,7 +3820,7 @@
               </a:defRPr>
             </a:pPr>
             <a:r>
-              <a:t>4. ЗАКОН СНЕЛЛИУСА</a:t>
+              <a:t>4. ЛУЧИ И ВОЛНЫ</a:t>
             </a:r>
           </a:p>
         </p:txBody>
@@ -3843,7 +3877,7 @@
         <p:spPr>
           <a:xfrm>
             <a:off x="1371600" y="1325880"/>
-            <a:ext cx="4937760" cy="5029200"/>
+            <a:ext cx="4754880" cy="5029200"/>
           </a:xfrm>
           <a:prstGeom prst="rect">
             <a:avLst/>
@@ -3860,15 +3894,15 @@
               <a:spcAft>
                 <a:spcPts val="600"/>
               </a:spcAft>
-              <a:defRPr sz="1400">
+              <a:defRPr sz="1300">
                 <a:solidFill>
                   <a:srgbClr val="EEEEEE"/>
                 </a:solidFill>
-                <a:latin typeface="Cambria Math"/>
+                <a:latin typeface="Calibri"/>
               </a:defRPr>
             </a:pPr>
             <a:r>
-              <a:t>n1 sin(θ¹) = n2 sin(θ²)</a:t>
+              <a:t>Геометрия: лучи, зеркала, линзы</a:t>
             </a:r>
           </a:p>
           <a:p>
@@ -3876,7 +3910,7 @@
               <a:spcAft>
                 <a:spcPts val="600"/>
               </a:spcAft>
-              <a:defRPr sz="1400">
+              <a:defRPr sz="1300">
                 <a:solidFill>
                   <a:srgbClr val="EEEEEE"/>
                 </a:solidFill>
@@ -3884,7 +3918,7 @@
               </a:defRPr>
             </a:pPr>
             <a:r>
-              <a:t>n = c / v — показатель преломления</a:t>
+              <a:t>У фокуса — дифракция</a:t>
             </a:r>
           </a:p>
           <a:p>
@@ -3892,7 +3926,7 @@
               <a:spcAft>
                 <a:spcPts val="600"/>
               </a:spcAft>
-              <a:defRPr sz="1400">
+              <a:defRPr sz="1300">
                 <a:solidFill>
                   <a:srgbClr val="EEEEEE"/>
                 </a:solidFill>
@@ -3900,7 +3934,7 @@
               </a:defRPr>
             </a:pPr>
             <a:r>
-              <a:t>Края линзы преломляют сильнее</a:t>
+              <a:t>Интерференция волн в апертуре</a:t>
             </a:r>
           </a:p>
           <a:p>
@@ -3908,7 +3942,7 @@
               <a:spcAft>
                 <a:spcPts val="600"/>
               </a:spcAft>
-              <a:defRPr sz="1400">
+              <a:defRPr sz="1300">
                 <a:solidFill>
                   <a:srgbClr val="EEEEEE"/>
                 </a:solidFill>
@@ -3916,7 +3950,23 @@
               </a:defRPr>
             </a:pPr>
             <a:r>
-              <a:t>Лучи сходятся в фокус</a:t>
+              <a:t>Лазер: когерентность → предсказуемый фокус</a:t>
+            </a:r>
+          </a:p>
+          <a:p>
+            <a:pPr>
+              <a:spcAft>
+                <a:spcPts val="600"/>
+              </a:spcAft>
+              <a:defRPr sz="1300">
+                <a:solidFill>
+                  <a:srgbClr val="EEEEEE"/>
+                </a:solidFill>
+                <a:latin typeface="Calibri"/>
+              </a:defRPr>
+            </a:pPr>
+            <a:r>
+              <a:t>Точки в фокусе нет — есть пятно d</a:t>
             </a:r>
           </a:p>
         </p:txBody>
@@ -3938,7 +3988,7 @@
         <p:spPr>
           <a:xfrm>
             <a:off x="6217920" y="1325880"/>
-            <a:ext cx="5394960" cy="3480619"/>
+            <a:ext cx="5394960" cy="3371850"/>
           </a:xfrm>
           <a:prstGeom prst="rect">
             <a:avLst/>
@@ -4148,7 +4198,7 @@
               </a:defRPr>
             </a:pPr>
             <a:r>
-              <a:t>Идеал; реальность — M²</a:t>
+              <a:t>Рабочее пятно станка часто больше предела</a:t>
             </a:r>
           </a:p>
         </p:txBody>
@@ -4226,6 +4276,238 @@
           <a:lstStyle/>
           <a:p>
             <a:pPr algn="l">
+              <a:defRPr sz="2400" b="1">
+                <a:solidFill>
+                  <a:srgbClr val="EEEEEE"/>
+                </a:solidFill>
+                <a:latin typeface="Calibri"/>
+              </a:defRPr>
+            </a:pPr>
+            <a:r>
+              <a:t>6. ОПТИЧЕСКИЙ ТРАКТ СЛП</a:t>
+            </a:r>
+          </a:p>
+        </p:txBody>
+      </p:sp>
+      <p:sp>
+        <p:nvSpPr>
+          <p:cNvPr id="3" name="Rectangle 2"/>
+          <p:cNvSpPr/>
+          <p:nvPr/>
+        </p:nvSpPr>
+        <p:spPr>
+          <a:xfrm>
+            <a:off x="1371600" y="1115568"/>
+            <a:ext cx="9418320" cy="38100"/>
+          </a:xfrm>
+          <a:prstGeom prst="rect">
+            <a:avLst/>
+          </a:prstGeom>
+          <a:solidFill>
+            <a:srgbClr val="E64A19"/>
+          </a:solidFill>
+          <a:ln>
+            <a:noFill/>
+          </a:ln>
+        </p:spPr>
+        <p:style>
+          <a:lnRef idx="1">
+            <a:schemeClr val="accent1"/>
+          </a:lnRef>
+          <a:fillRef idx="3">
+            <a:schemeClr val="accent1"/>
+          </a:fillRef>
+          <a:effectRef idx="2">
+            <a:schemeClr val="accent1"/>
+          </a:effectRef>
+          <a:fontRef idx="minor">
+            <a:schemeClr val="lt1"/>
+          </a:fontRef>
+        </p:style>
+        <p:txBody>
+          <a:bodyPr rtlCol="0" anchor="ctr"/>
+          <a:lstStyle/>
+          <a:p>
+            <a:pPr algn="ctr"/>
+          </a:p>
+        </p:txBody>
+      </p:sp>
+      <p:sp>
+        <p:nvSpPr>
+          <p:cNvPr id="4" name="TextBox 3"/>
+          <p:cNvSpPr txBox="1"/>
+          <p:nvPr/>
+        </p:nvSpPr>
+        <p:spPr>
+          <a:xfrm>
+            <a:off x="1371600" y="1325880"/>
+            <a:ext cx="4572000" cy="5029200"/>
+          </a:xfrm>
+          <a:prstGeom prst="rect">
+            <a:avLst/>
+          </a:prstGeom>
+          <a:noFill/>
+        </p:spPr>
+        <p:txBody>
+          <a:bodyPr wrap="square">
+            <a:spAutoFit/>
+          </a:bodyPr>
+          <a:lstStyle/>
+          <a:p>
+            <a:pPr>
+              <a:spcAft>
+                <a:spcPts val="600"/>
+              </a:spcAft>
+              <a:defRPr sz="1400">
+                <a:solidFill>
+                  <a:srgbClr val="EEEEEE"/>
+                </a:solidFill>
+                <a:latin typeface="Calibri"/>
+              </a:defRPr>
+            </a:pPr>
+            <a:r>
+              <a:t>Волокно → коллиматор</a:t>
+            </a:r>
+          </a:p>
+          <a:p>
+            <a:pPr>
+              <a:spcAft>
+                <a:spcPts val="600"/>
+              </a:spcAft>
+              <a:defRPr sz="1400">
+                <a:solidFill>
+                  <a:srgbClr val="EEEEEE"/>
+                </a:solidFill>
+                <a:latin typeface="Calibri"/>
+              </a:defRPr>
+            </a:pPr>
+            <a:r>
+              <a:t>Гальво</a:t>
+            </a:r>
+          </a:p>
+          <a:p>
+            <a:pPr>
+              <a:spcAft>
+                <a:spcPts val="600"/>
+              </a:spcAft>
+              <a:defRPr sz="1400">
+                <a:solidFill>
+                  <a:srgbClr val="EEEEEE"/>
+                </a:solidFill>
+                <a:latin typeface="Cambria Math"/>
+              </a:defRPr>
+            </a:pPr>
+            <a:r>
+              <a:t>F-θ</a:t>
+            </a:r>
+          </a:p>
+          <a:p>
+            <a:pPr>
+              <a:spcAft>
+                <a:spcPts val="600"/>
+              </a:spcAft>
+              <a:defRPr sz="1400">
+                <a:solidFill>
+                  <a:srgbClr val="EEEEEE"/>
+                </a:solidFill>
+                <a:latin typeface="Calibri"/>
+              </a:defRPr>
+            </a:pPr>
+            <a:r>
+              <a:t>Защитное стекло</a:t>
+            </a:r>
+          </a:p>
+          <a:p>
+            <a:pPr>
+              <a:spcAft>
+                <a:spcPts val="600"/>
+              </a:spcAft>
+              <a:defRPr sz="1400">
+                <a:solidFill>
+                  <a:srgbClr val="EEEEEE"/>
+                </a:solidFill>
+                <a:latin typeface="Calibri"/>
+              </a:defRPr>
+            </a:pPr>
+            <a:r>
+              <a:t>Загрязнение → сдвиг фокуса</a:t>
+            </a:r>
+          </a:p>
+        </p:txBody>
+      </p:sp>
+      <p:pic>
+        <p:nvPicPr>
+          <p:cNvPr id="5" name="Picture 4" descr="diag_5.png"/>
+          <p:cNvPicPr>
+            <a:picLocks noChangeAspect="1"/>
+          </p:cNvPicPr>
+          <p:nvPr/>
+        </p:nvPicPr>
+        <p:blipFill>
+          <a:blip r:embed="rId2"/>
+          <a:stretch>
+            <a:fillRect/>
+          </a:stretch>
+        </p:blipFill>
+        <p:spPr>
+          <a:xfrm>
+            <a:off x="6217920" y="1325880"/>
+            <a:ext cx="5394960" cy="3371850"/>
+          </a:xfrm>
+          <a:prstGeom prst="rect">
+            <a:avLst/>
+          </a:prstGeom>
+        </p:spPr>
+      </p:pic>
+    </p:spTree>
+  </p:cSld>
+  <p:clrMapOvr>
+    <a:masterClrMapping/>
+  </p:clrMapOvr>
+</p:sld>
+</file>
+
+<file path=ppt/slides/slide7.xml><?xml version="1.0" encoding="utf-8"?>
+<p:sld xmlns:a="http://schemas.openxmlformats.org/drawingml/2006/main" xmlns:p="http://schemas.openxmlformats.org/presentationml/2006/main" xmlns:r="http://schemas.openxmlformats.org/officeDocument/2006/relationships">
+  <p:cSld>
+    <p:bg>
+      <p:bgPr>
+        <a:solidFill>
+          <a:srgbClr val="1A1A2E"/>
+        </a:solidFill>
+        <a:effectLst/>
+      </p:bgPr>
+    </p:bg>
+    <p:spTree>
+      <p:nvGrpSpPr>
+        <p:cNvPr id="1" name=""/>
+        <p:cNvGrpSpPr/>
+        <p:nvPr/>
+      </p:nvGrpSpPr>
+      <p:grpSpPr/>
+      <p:sp>
+        <p:nvSpPr>
+          <p:cNvPr id="2" name="TextBox 1"/>
+          <p:cNvSpPr txBox="1"/>
+          <p:nvPr/>
+        </p:nvSpPr>
+        <p:spPr>
+          <a:xfrm>
+            <a:off x="1371600" y="274320"/>
+            <a:ext cx="9418320" cy="822960"/>
+          </a:xfrm>
+          <a:prstGeom prst="rect">
+            <a:avLst/>
+          </a:prstGeom>
+          <a:noFill/>
+        </p:spPr>
+        <p:txBody>
+          <a:bodyPr wrap="square">
+            <a:spAutoFit/>
+          </a:bodyPr>
+          <a:lstStyle/>
+          <a:p>
+            <a:pPr algn="l">
               <a:defRPr sz="2200" b="1">
                 <a:solidFill>
                   <a:srgbClr val="EEEEEE"/>
@@ -4234,7 +4516,7 @@
               </a:defRPr>
             </a:pPr>
             <a:r>
-              <a:t>6. ГЛУБИНА РЕЗКОСТИ (ФОРМУЛА №2)</a:t>
+              <a:t>7. ГЛУБИНА РЕЗКОСТИ (ФОРМУЛА №2)</a:t>
             </a:r>
           </a:p>
         </p:txBody>
@@ -4906,7 +5188,7 @@
 </p:sld>
 </file>
 
-<file path=ppt/slides/slide7.xml><?xml version="1.0" encoding="utf-8"?>
+<file path=ppt/slides/slide8.xml><?xml version="1.0" encoding="utf-8"?>
 <p:sld xmlns:a="http://schemas.openxmlformats.org/drawingml/2006/main" xmlns:p="http://schemas.openxmlformats.org/presentationml/2006/main" xmlns:r="http://schemas.openxmlformats.org/officeDocument/2006/relationships">
   <p:cSld>
     <p:bg>
@@ -4947,7 +5229,7 @@
           <a:lstStyle/>
           <a:p>
             <a:pPr algn="l">
-              <a:defRPr sz="2800" b="1">
+              <a:defRPr sz="2600" b="1">
                 <a:solidFill>
                   <a:srgbClr val="EEEEEE"/>
                 </a:solidFill>
@@ -4955,7 +5237,7 @@
               </a:defRPr>
             </a:pPr>
             <a:r>
-              <a:t>7. M² И ИТОГИ</a:t>
+              <a:t>8. ФОКУС НА ПРАКТИКЕ</a:t>
             </a:r>
           </a:p>
         </p:txBody>
@@ -5012,6 +5294,238 @@
         <p:spPr>
           <a:xfrm>
             <a:off x="1371600" y="1325880"/>
+            <a:ext cx="4754880" cy="5029200"/>
+          </a:xfrm>
+          <a:prstGeom prst="rect">
+            <a:avLst/>
+          </a:prstGeom>
+          <a:noFill/>
+        </p:spPr>
+        <p:txBody>
+          <a:bodyPr wrap="square">
+            <a:spAutoFit/>
+          </a:bodyPr>
+          <a:lstStyle/>
+          <a:p>
+            <a:pPr>
+              <a:spcAft>
+                <a:spcPts val="600"/>
+              </a:spcAft>
+              <a:defRPr sz="1300">
+                <a:solidFill>
+                  <a:srgbClr val="EEEEEE"/>
+                </a:solidFill>
+                <a:latin typeface="Calibri"/>
+              </a:defRPr>
+            </a:pPr>
+            <a:r>
+              <a:t>Фокус: ниже / в слое / выше</a:t>
+            </a:r>
+          </a:p>
+          <a:p>
+            <a:pPr>
+              <a:spcAft>
+                <a:spcPts val="600"/>
+              </a:spcAft>
+              <a:defRPr sz="1300">
+                <a:solidFill>
+                  <a:srgbClr val="EEEEEE"/>
+                </a:solidFill>
+                <a:latin typeface="Calibri"/>
+              </a:defRPr>
+            </a:pPr>
+            <a:r>
+              <a:t>z-offset → d, I</a:t>
+            </a:r>
+          </a:p>
+          <a:p>
+            <a:pPr>
+              <a:spcAft>
+                <a:spcPts val="600"/>
+              </a:spcAft>
+              <a:defRPr sz="1300">
+                <a:solidFill>
+                  <a:srgbClr val="EEEEEE"/>
+                </a:solidFill>
+                <a:latin typeface="Calibri"/>
+              </a:defRPr>
+            </a:pPr>
+            <a:r>
+              <a:t>DOF</a:t>
+            </a:r>
+          </a:p>
+          <a:p>
+            <a:pPr>
+              <a:spcAft>
+                <a:spcPts val="600"/>
+              </a:spcAft>
+              <a:defRPr sz="1300">
+                <a:solidFill>
+                  <a:srgbClr val="EEEEEE"/>
+                </a:solidFill>
+                <a:latin typeface="Calibri"/>
+              </a:defRPr>
+            </a:pPr>
+            <a:r>
+              <a:t>Загрязнение → термолинза</a:t>
+            </a:r>
+          </a:p>
+          <a:p>
+            <a:pPr>
+              <a:spcAft>
+                <a:spcPts val="600"/>
+              </a:spcAft>
+              <a:defRPr sz="1300">
+                <a:solidFill>
+                  <a:srgbClr val="EEEEEE"/>
+                </a:solidFill>
+                <a:latin typeface="Calibri"/>
+              </a:defRPr>
+            </a:pPr>
+            <a:r>
+              <a:t>Чистота оптики = параметр процесса</a:t>
+            </a:r>
+          </a:p>
+        </p:txBody>
+      </p:sp>
+      <p:pic>
+        <p:nvPicPr>
+          <p:cNvPr id="5" name="Picture 4" descr="diag_7.png"/>
+          <p:cNvPicPr>
+            <a:picLocks noChangeAspect="1"/>
+          </p:cNvPicPr>
+          <p:nvPr/>
+        </p:nvPicPr>
+        <p:blipFill>
+          <a:blip r:embed="rId2"/>
+          <a:stretch>
+            <a:fillRect/>
+          </a:stretch>
+        </p:blipFill>
+        <p:spPr>
+          <a:xfrm>
+            <a:off x="6217920" y="1325880"/>
+            <a:ext cx="5394960" cy="3371850"/>
+          </a:xfrm>
+          <a:prstGeom prst="rect">
+            <a:avLst/>
+          </a:prstGeom>
+        </p:spPr>
+      </p:pic>
+    </p:spTree>
+  </p:cSld>
+  <p:clrMapOvr>
+    <a:masterClrMapping/>
+  </p:clrMapOvr>
+</p:sld>
+</file>
+
+<file path=ppt/slides/slide9.xml><?xml version="1.0" encoding="utf-8"?>
+<p:sld xmlns:a="http://schemas.openxmlformats.org/drawingml/2006/main" xmlns:p="http://schemas.openxmlformats.org/presentationml/2006/main" xmlns:r="http://schemas.openxmlformats.org/officeDocument/2006/relationships">
+  <p:cSld>
+    <p:bg>
+      <p:bgPr>
+        <a:solidFill>
+          <a:srgbClr val="1A1A2E"/>
+        </a:solidFill>
+        <a:effectLst/>
+      </p:bgPr>
+    </p:bg>
+    <p:spTree>
+      <p:nvGrpSpPr>
+        <p:cNvPr id="1" name=""/>
+        <p:cNvGrpSpPr/>
+        <p:nvPr/>
+      </p:nvGrpSpPr>
+      <p:grpSpPr/>
+      <p:sp>
+        <p:nvSpPr>
+          <p:cNvPr id="2" name="TextBox 1"/>
+          <p:cNvSpPr txBox="1"/>
+          <p:nvPr/>
+        </p:nvSpPr>
+        <p:spPr>
+          <a:xfrm>
+            <a:off x="1371600" y="274320"/>
+            <a:ext cx="9418320" cy="822960"/>
+          </a:xfrm>
+          <a:prstGeom prst="rect">
+            <a:avLst/>
+          </a:prstGeom>
+          <a:noFill/>
+        </p:spPr>
+        <p:txBody>
+          <a:bodyPr wrap="square">
+            <a:spAutoFit/>
+          </a:bodyPr>
+          <a:lstStyle/>
+          <a:p>
+            <a:pPr algn="l">
+              <a:defRPr sz="2800" b="1">
+                <a:solidFill>
+                  <a:srgbClr val="EEEEEE"/>
+                </a:solidFill>
+                <a:latin typeface="Calibri"/>
+              </a:defRPr>
+            </a:pPr>
+            <a:r>
+              <a:t>9. M² И ИТОГИ</a:t>
+            </a:r>
+          </a:p>
+        </p:txBody>
+      </p:sp>
+      <p:sp>
+        <p:nvSpPr>
+          <p:cNvPr id="3" name="Rectangle 2"/>
+          <p:cNvSpPr/>
+          <p:nvPr/>
+        </p:nvSpPr>
+        <p:spPr>
+          <a:xfrm>
+            <a:off x="1371600" y="1115568"/>
+            <a:ext cx="9418320" cy="38100"/>
+          </a:xfrm>
+          <a:prstGeom prst="rect">
+            <a:avLst/>
+          </a:prstGeom>
+          <a:solidFill>
+            <a:srgbClr val="E64A19"/>
+          </a:solidFill>
+          <a:ln>
+            <a:noFill/>
+          </a:ln>
+        </p:spPr>
+        <p:style>
+          <a:lnRef idx="1">
+            <a:schemeClr val="accent1"/>
+          </a:lnRef>
+          <a:fillRef idx="3">
+            <a:schemeClr val="accent1"/>
+          </a:fillRef>
+          <a:effectRef idx="2">
+            <a:schemeClr val="accent1"/>
+          </a:effectRef>
+          <a:fontRef idx="minor">
+            <a:schemeClr val="lt1"/>
+          </a:fontRef>
+        </p:style>
+        <p:txBody>
+          <a:bodyPr rtlCol="0" anchor="ctr"/>
+          <a:lstStyle/>
+          <a:p>
+            <a:pPr algn="ctr"/>
+          </a:p>
+        </p:txBody>
+      </p:sp>
+      <p:sp>
+        <p:nvSpPr>
+          <p:cNvPr id="4" name="TextBox 3"/>
+          <p:cNvSpPr txBox="1"/>
+          <p:nvPr/>
+        </p:nvSpPr>
+        <p:spPr>
+          <a:xfrm>
+            <a:off x="1371600" y="1325880"/>
             <a:ext cx="4937760" cy="5029200"/>
           </a:xfrm>
           <a:prstGeom prst="rect">
@@ -5092,7 +5606,7 @@
       </p:sp>
       <p:pic>
         <p:nvPicPr>
-          <p:cNvPr id="5" name="Picture 4" descr="diag_6.png"/>
+          <p:cNvPr id="5" name="Picture 4" descr="diag_8.png"/>
           <p:cNvPicPr>
             <a:picLocks noChangeAspect="1"/>
           </p:cNvPicPr>
